--- a/pidsimu/pre_pid.pptx
+++ b/pidsimu/pre_pid.pptx
@@ -123,7 +123,7 @@
 <file path=ppt/revisionInfo.xml><?xml version="1.0" encoding="utf-8"?>
 <p1510:revInfo xmlns:a="http://schemas.openxmlformats.org/drawingml/2006/main" xmlns:r="http://schemas.openxmlformats.org/officeDocument/2006/relationships" xmlns:p1510="http://schemas.microsoft.com/office/powerpoint/2015/10/main">
   <p1510:revLst>
-    <p1510:client id="{79C2DF91-3E6E-4567-ADB2-673B7A6CADAC}" v="21" dt="2025-07-23T22:41:50.576"/>
+    <p1510:client id="{A9025CAA-BD30-4771-A35E-431B86430C66}" v="1" dt="2026-01-23T20:42:09.850"/>
   </p1510:revLst>
 </p1510:revInfo>
 </file>
@@ -131,307 +131,24 @@
 <file path=ppt/changesInfos/changesInfo1.xml><?xml version="1.0" encoding="utf-8"?>
 <pc:chgInfo xmlns:a="http://schemas.openxmlformats.org/drawingml/2006/main" xmlns:r="http://schemas.openxmlformats.org/officeDocument/2006/relationships" xmlns:ac="http://schemas.microsoft.com/office/drawing/2013/main/command" xmlns:pc="http://schemas.microsoft.com/office/powerpoint/2013/main/command">
   <pc:docChgLst>
-    <pc:chgData name="淏铭 叶" userId="b3014e5ccf383018" providerId="LiveId" clId="{79C2DF91-3E6E-4567-ADB2-673B7A6CADAC}"/>
-    <pc:docChg chg="custSel addSld modSld">
-      <pc:chgData name="淏铭 叶" userId="b3014e5ccf383018" providerId="LiveId" clId="{79C2DF91-3E6E-4567-ADB2-673B7A6CADAC}" dt="2025-07-24T03:49:14.743" v="1723" actId="1076"/>
+    <pc:chgData name="淏铭 叶" userId="b3014e5ccf383018" providerId="LiveId" clId="{8A9D9858-B2B2-4B5F-AD30-DA08BA709FA1}"/>
+    <pc:docChg chg="custSel modSld">
+      <pc:chgData name="淏铭 叶" userId="b3014e5ccf383018" providerId="LiveId" clId="{8A9D9858-B2B2-4B5F-AD30-DA08BA709FA1}" dt="2026-01-23T20:42:46.348" v="5" actId="478"/>
       <pc:docMkLst>
         <pc:docMk/>
       </pc:docMkLst>
-      <pc:sldChg chg="addSp modSp new mod">
-        <pc:chgData name="淏铭 叶" userId="b3014e5ccf383018" providerId="LiveId" clId="{79C2DF91-3E6E-4567-ADB2-673B7A6CADAC}" dt="2025-07-24T02:33:04.284" v="1715" actId="1076"/>
-        <pc:sldMkLst>
-          <pc:docMk/>
-          <pc:sldMk cId="2261518811" sldId="256"/>
-        </pc:sldMkLst>
-        <pc:spChg chg="mod">
-          <ac:chgData name="淏铭 叶" userId="b3014e5ccf383018" providerId="LiveId" clId="{79C2DF91-3E6E-4567-ADB2-673B7A6CADAC}" dt="2025-07-24T02:33:04.284" v="1715" actId="1076"/>
-          <ac:spMkLst>
-            <pc:docMk/>
-            <pc:sldMk cId="2261518811" sldId="256"/>
-            <ac:spMk id="2" creationId="{66ACB843-8E1A-6E30-88AC-275ED1576F9F}"/>
-          </ac:spMkLst>
-        </pc:spChg>
-        <pc:spChg chg="mod">
-          <ac:chgData name="淏铭 叶" userId="b3014e5ccf383018" providerId="LiveId" clId="{79C2DF91-3E6E-4567-ADB2-673B7A6CADAC}" dt="2025-07-22T22:44:25.181" v="375" actId="20577"/>
-          <ac:spMkLst>
-            <pc:docMk/>
-            <pc:sldMk cId="2261518811" sldId="256"/>
-            <ac:spMk id="3" creationId="{8367DB96-CB03-0C6A-8AC4-ECDD78BDABAF}"/>
-          </ac:spMkLst>
-        </pc:spChg>
-        <pc:picChg chg="add mod modCrop">
-          <ac:chgData name="淏铭 叶" userId="b3014e5ccf383018" providerId="LiveId" clId="{79C2DF91-3E6E-4567-ADB2-673B7A6CADAC}" dt="2025-07-22T22:42:05.925" v="90" actId="1076"/>
-          <ac:picMkLst>
-            <pc:docMk/>
-            <pc:sldMk cId="2261518811" sldId="256"/>
-            <ac:picMk id="4" creationId="{87F98EA3-1904-FC15-4EEB-0E99482398DE}"/>
-          </ac:picMkLst>
-        </pc:picChg>
-      </pc:sldChg>
-      <pc:sldChg chg="addSp delSp modSp new mod">
-        <pc:chgData name="淏铭 叶" userId="b3014e5ccf383018" providerId="LiveId" clId="{79C2DF91-3E6E-4567-ADB2-673B7A6CADAC}" dt="2025-07-22T22:55:59.345" v="583" actId="1076"/>
-        <pc:sldMkLst>
-          <pc:docMk/>
-          <pc:sldMk cId="2377116680" sldId="257"/>
-        </pc:sldMkLst>
-        <pc:spChg chg="mod">
-          <ac:chgData name="淏铭 叶" userId="b3014e5ccf383018" providerId="LiveId" clId="{79C2DF91-3E6E-4567-ADB2-673B7A6CADAC}" dt="2025-07-22T22:36:46.819" v="85" actId="1076"/>
-          <ac:spMkLst>
-            <pc:docMk/>
-            <pc:sldMk cId="2377116680" sldId="257"/>
-            <ac:spMk id="2" creationId="{45CE5B12-E6F8-179E-4F42-2B3BBA96D0D5}"/>
-          </ac:spMkLst>
-        </pc:spChg>
-        <pc:spChg chg="mod">
-          <ac:chgData name="淏铭 叶" userId="b3014e5ccf383018" providerId="LiveId" clId="{79C2DF91-3E6E-4567-ADB2-673B7A6CADAC}" dt="2025-07-22T22:53:53.293" v="561" actId="20577"/>
-          <ac:spMkLst>
-            <pc:docMk/>
-            <pc:sldMk cId="2377116680" sldId="257"/>
-            <ac:spMk id="3" creationId="{2CCC8F08-56C5-682B-6D55-E852DE9DA2FC}"/>
-          </ac:spMkLst>
-        </pc:spChg>
-        <pc:spChg chg="add mod">
-          <ac:chgData name="淏铭 叶" userId="b3014e5ccf383018" providerId="LiveId" clId="{79C2DF91-3E6E-4567-ADB2-673B7A6CADAC}" dt="2025-07-22T22:54:09.031" v="566" actId="1076"/>
-          <ac:spMkLst>
-            <pc:docMk/>
-            <pc:sldMk cId="2377116680" sldId="257"/>
-            <ac:spMk id="7" creationId="{4541FBA8-992F-7D65-53DA-9F3182947032}"/>
-          </ac:spMkLst>
-        </pc:spChg>
-        <pc:picChg chg="add mod">
-          <ac:chgData name="淏铭 叶" userId="b3014e5ccf383018" providerId="LiveId" clId="{79C2DF91-3E6E-4567-ADB2-673B7A6CADAC}" dt="2025-07-22T22:53:58.974" v="562" actId="1076"/>
-          <ac:picMkLst>
-            <pc:docMk/>
-            <pc:sldMk cId="2377116680" sldId="257"/>
-            <ac:picMk id="4" creationId="{AA676353-D1D8-C730-02CD-46566752F8AC}"/>
-          </ac:picMkLst>
-        </pc:picChg>
-        <pc:picChg chg="add mod">
-          <ac:chgData name="淏铭 叶" userId="b3014e5ccf383018" providerId="LiveId" clId="{79C2DF91-3E6E-4567-ADB2-673B7A6CADAC}" dt="2025-07-22T22:54:05.908" v="565" actId="1076"/>
-          <ac:picMkLst>
-            <pc:docMk/>
-            <pc:sldMk cId="2377116680" sldId="257"/>
-            <ac:picMk id="5" creationId="{654639DD-056A-296B-A9C2-D5D7E7A59982}"/>
-          </ac:picMkLst>
-        </pc:picChg>
-        <pc:picChg chg="add mod">
-          <ac:chgData name="淏铭 叶" userId="b3014e5ccf383018" providerId="LiveId" clId="{79C2DF91-3E6E-4567-ADB2-673B7A6CADAC}" dt="2025-07-22T22:55:46.291" v="580" actId="1076"/>
-          <ac:picMkLst>
-            <pc:docMk/>
-            <pc:sldMk cId="2377116680" sldId="257"/>
-            <ac:picMk id="6" creationId="{865E9C45-BBE7-695C-7C12-8A2F860CAAEB}"/>
-          </ac:picMkLst>
-        </pc:picChg>
-        <pc:picChg chg="add mod">
-          <ac:chgData name="淏铭 叶" userId="b3014e5ccf383018" providerId="LiveId" clId="{79C2DF91-3E6E-4567-ADB2-673B7A6CADAC}" dt="2025-07-22T22:54:10.146" v="567" actId="1076"/>
-          <ac:picMkLst>
-            <pc:docMk/>
-            <pc:sldMk cId="2377116680" sldId="257"/>
-            <ac:picMk id="9" creationId="{4628F5BD-FB30-DFF3-940D-BA4E1C978EC4}"/>
-          </ac:picMkLst>
-        </pc:picChg>
-        <pc:picChg chg="add mod modCrop">
-          <ac:chgData name="淏铭 叶" userId="b3014e5ccf383018" providerId="LiveId" clId="{79C2DF91-3E6E-4567-ADB2-673B7A6CADAC}" dt="2025-07-22T22:54:10.970" v="568" actId="1076"/>
-          <ac:picMkLst>
-            <pc:docMk/>
-            <pc:sldMk cId="2377116680" sldId="257"/>
-            <ac:picMk id="10" creationId="{D815B106-DB9E-84F8-AD16-4859EABF0A41}"/>
-          </ac:picMkLst>
-        </pc:picChg>
-        <pc:picChg chg="add mod">
-          <ac:chgData name="淏铭 叶" userId="b3014e5ccf383018" providerId="LiveId" clId="{79C2DF91-3E6E-4567-ADB2-673B7A6CADAC}" dt="2025-07-22T22:54:32.457" v="575" actId="1076"/>
-          <ac:picMkLst>
-            <pc:docMk/>
-            <pc:sldMk cId="2377116680" sldId="257"/>
-            <ac:picMk id="11" creationId="{317DD291-D76D-BA69-5459-E7ACA13976C4}"/>
-          </ac:picMkLst>
-        </pc:picChg>
-        <pc:picChg chg="add mod">
-          <ac:chgData name="淏铭 叶" userId="b3014e5ccf383018" providerId="LiveId" clId="{79C2DF91-3E6E-4567-ADB2-673B7A6CADAC}" dt="2025-07-22T22:55:59.345" v="583" actId="1076"/>
-          <ac:picMkLst>
-            <pc:docMk/>
-            <pc:sldMk cId="2377116680" sldId="257"/>
-            <ac:picMk id="12" creationId="{E8FDE8B4-5185-EED9-C4AA-3F9121335C9F}"/>
-          </ac:picMkLst>
-        </pc:picChg>
-      </pc:sldChg>
-      <pc:sldChg chg="addSp modSp new mod">
-        <pc:chgData name="淏铭 叶" userId="b3014e5ccf383018" providerId="LiveId" clId="{79C2DF91-3E6E-4567-ADB2-673B7A6CADAC}" dt="2025-07-22T22:59:00.662" v="871" actId="1076"/>
-        <pc:sldMkLst>
-          <pc:docMk/>
-          <pc:sldMk cId="2808971871" sldId="258"/>
-        </pc:sldMkLst>
-        <pc:spChg chg="mod">
-          <ac:chgData name="淏铭 叶" userId="b3014e5ccf383018" providerId="LiveId" clId="{79C2DF91-3E6E-4567-ADB2-673B7A6CADAC}" dt="2025-07-22T22:56:35.391" v="627" actId="1076"/>
-          <ac:spMkLst>
-            <pc:docMk/>
-            <pc:sldMk cId="2808971871" sldId="258"/>
-            <ac:spMk id="2" creationId="{1E795744-48FA-8598-8E8A-99AA79F35DE8}"/>
-          </ac:spMkLst>
-        </pc:spChg>
-        <pc:spChg chg="mod">
-          <ac:chgData name="淏铭 叶" userId="b3014e5ccf383018" providerId="LiveId" clId="{79C2DF91-3E6E-4567-ADB2-673B7A6CADAC}" dt="2025-07-22T22:58:52.691" v="867" actId="20577"/>
-          <ac:spMkLst>
-            <pc:docMk/>
-            <pc:sldMk cId="2808971871" sldId="258"/>
-            <ac:spMk id="3" creationId="{870F34C6-18AF-3FAF-5DB9-65ADB51E6D9B}"/>
-          </ac:spMkLst>
-        </pc:spChg>
-        <pc:picChg chg="add mod">
-          <ac:chgData name="淏铭 叶" userId="b3014e5ccf383018" providerId="LiveId" clId="{79C2DF91-3E6E-4567-ADB2-673B7A6CADAC}" dt="2025-07-22T22:59:00.662" v="871" actId="1076"/>
-          <ac:picMkLst>
-            <pc:docMk/>
-            <pc:sldMk cId="2808971871" sldId="258"/>
-            <ac:picMk id="4" creationId="{CD025DCD-4400-38DF-2B8A-1C7D1890EB4D}"/>
-          </ac:picMkLst>
-        </pc:picChg>
-      </pc:sldChg>
-      <pc:sldChg chg="addSp delSp modSp new mod">
-        <pc:chgData name="淏铭 叶" userId="b3014e5ccf383018" providerId="LiveId" clId="{79C2DF91-3E6E-4567-ADB2-673B7A6CADAC}" dt="2025-07-24T03:49:14.743" v="1723" actId="1076"/>
-        <pc:sldMkLst>
-          <pc:docMk/>
-          <pc:sldMk cId="3437179829" sldId="259"/>
-        </pc:sldMkLst>
-        <pc:spChg chg="mod">
-          <ac:chgData name="淏铭 叶" userId="b3014e5ccf383018" providerId="LiveId" clId="{79C2DF91-3E6E-4567-ADB2-673B7A6CADAC}" dt="2025-07-22T23:00:42.294" v="967" actId="20577"/>
-          <ac:spMkLst>
-            <pc:docMk/>
-            <pc:sldMk cId="3437179829" sldId="259"/>
-            <ac:spMk id="2" creationId="{5663D018-8BAA-C0C7-AB7B-2CEE212FDAE6}"/>
-          </ac:spMkLst>
-        </pc:spChg>
-        <pc:spChg chg="add mod">
-          <ac:chgData name="淏铭 叶" userId="b3014e5ccf383018" providerId="LiveId" clId="{79C2DF91-3E6E-4567-ADB2-673B7A6CADAC}" dt="2025-07-23T00:29:32.851" v="1475" actId="1076"/>
-          <ac:spMkLst>
-            <pc:docMk/>
-            <pc:sldMk cId="3437179829" sldId="259"/>
-            <ac:spMk id="3" creationId="{9F475578-0DF1-BB78-8877-CF2AD8075825}"/>
-          </ac:spMkLst>
-        </pc:spChg>
-        <pc:spChg chg="add mod">
-          <ac:chgData name="淏铭 叶" userId="b3014e5ccf383018" providerId="LiveId" clId="{79C2DF91-3E6E-4567-ADB2-673B7A6CADAC}" dt="2025-07-24T03:49:14.743" v="1723" actId="1076"/>
-          <ac:spMkLst>
-            <pc:docMk/>
-            <pc:sldMk cId="3437179829" sldId="259"/>
-            <ac:spMk id="6" creationId="{29652A78-894C-7D6D-E83A-1F44A294366D}"/>
-          </ac:spMkLst>
-        </pc:spChg>
-        <pc:picChg chg="add mod">
-          <ac:chgData name="淏铭 叶" userId="b3014e5ccf383018" providerId="LiveId" clId="{79C2DF91-3E6E-4567-ADB2-673B7A6CADAC}" dt="2025-07-22T23:00:30.359" v="940" actId="1076"/>
-          <ac:picMkLst>
-            <pc:docMk/>
-            <pc:sldMk cId="3437179829" sldId="259"/>
-            <ac:picMk id="4" creationId="{8AF87D5C-8A7B-D7FA-2BB9-30D90218FE25}"/>
-          </ac:picMkLst>
-        </pc:picChg>
-        <pc:picChg chg="add mod">
-          <ac:chgData name="淏铭 叶" userId="b3014e5ccf383018" providerId="LiveId" clId="{79C2DF91-3E6E-4567-ADB2-673B7A6CADAC}" dt="2025-07-22T23:00:31.371" v="941" actId="1076"/>
-          <ac:picMkLst>
-            <pc:docMk/>
-            <pc:sldMk cId="3437179829" sldId="259"/>
-            <ac:picMk id="5" creationId="{5005A961-88D8-B6BD-B866-DB846CDCF340}"/>
-          </ac:picMkLst>
-        </pc:picChg>
-      </pc:sldChg>
-      <pc:sldChg chg="addSp modSp new mod">
-        <pc:chgData name="淏铭 叶" userId="b3014e5ccf383018" providerId="LiveId" clId="{79C2DF91-3E6E-4567-ADB2-673B7A6CADAC}" dt="2025-07-22T23:16:17.517" v="1412"/>
+      <pc:sldChg chg="addSp delSp modSp mod">
+        <pc:chgData name="淏铭 叶" userId="b3014e5ccf383018" providerId="LiveId" clId="{8A9D9858-B2B2-4B5F-AD30-DA08BA709FA1}" dt="2026-01-23T20:42:46.348" v="5" actId="478"/>
         <pc:sldMkLst>
           <pc:docMk/>
           <pc:sldMk cId="2558128729" sldId="260"/>
         </pc:sldMkLst>
-        <pc:spChg chg="mod">
-          <ac:chgData name="淏铭 叶" userId="b3014e5ccf383018" providerId="LiveId" clId="{79C2DF91-3E6E-4567-ADB2-673B7A6CADAC}" dt="2025-07-22T23:06:20.890" v="1401" actId="20577"/>
-          <ac:spMkLst>
-            <pc:docMk/>
-            <pc:sldMk cId="2558128729" sldId="260"/>
-            <ac:spMk id="2" creationId="{3A1A8402-09AA-FD06-6CDB-6D35289A2355}"/>
-          </ac:spMkLst>
-        </pc:spChg>
-        <pc:spChg chg="mod">
-          <ac:chgData name="淏铭 叶" userId="b3014e5ccf383018" providerId="LiveId" clId="{79C2DF91-3E6E-4567-ADB2-673B7A6CADAC}" dt="2025-07-22T23:16:17.517" v="1412"/>
-          <ac:spMkLst>
-            <pc:docMk/>
-            <pc:sldMk cId="2558128729" sldId="260"/>
-            <ac:spMk id="3" creationId="{C7389B56-79BC-8211-2982-68DB66BA591E}"/>
-          </ac:spMkLst>
-        </pc:spChg>
-        <pc:picChg chg="add mod">
-          <ac:chgData name="淏铭 叶" userId="b3014e5ccf383018" providerId="LiveId" clId="{79C2DF91-3E6E-4567-ADB2-673B7A6CADAC}" dt="2025-07-22T23:08:07.013" v="1410" actId="1076"/>
+        <pc:picChg chg="add del mod">
+          <ac:chgData name="淏铭 叶" userId="b3014e5ccf383018" providerId="LiveId" clId="{8A9D9858-B2B2-4B5F-AD30-DA08BA709FA1}" dt="2026-01-23T20:42:46.348" v="5" actId="478"/>
           <ac:picMkLst>
             <pc:docMk/>
             <pc:sldMk cId="2558128729" sldId="260"/>
-            <ac:picMk id="4" creationId="{F90F7DB7-B3A7-976F-E7CE-6979389DCB81}"/>
-          </ac:picMkLst>
-        </pc:picChg>
-        <pc:picChg chg="add mod">
-          <ac:chgData name="淏铭 叶" userId="b3014e5ccf383018" providerId="LiveId" clId="{79C2DF91-3E6E-4567-ADB2-673B7A6CADAC}" dt="2025-07-22T23:06:30.436" v="1402" actId="1076"/>
-          <ac:picMkLst>
-            <pc:docMk/>
-            <pc:sldMk cId="2558128729" sldId="260"/>
-            <ac:picMk id="5" creationId="{C0CFD6B1-3F52-561B-4B4E-B217FD6FC1AF}"/>
-          </ac:picMkLst>
-        </pc:picChg>
-        <pc:picChg chg="add mod">
-          <ac:chgData name="淏铭 叶" userId="b3014e5ccf383018" providerId="LiveId" clId="{79C2DF91-3E6E-4567-ADB2-673B7A6CADAC}" dt="2025-07-22T23:05:45.908" v="1365" actId="1076"/>
-          <ac:picMkLst>
-            <pc:docMk/>
-            <pc:sldMk cId="2558128729" sldId="260"/>
-            <ac:picMk id="6" creationId="{0AC556F2-1781-B27A-95F3-3AAF20D366EA}"/>
-          </ac:picMkLst>
-        </pc:picChg>
-        <pc:picChg chg="add mod">
-          <ac:chgData name="淏铭 叶" userId="b3014e5ccf383018" providerId="LiveId" clId="{79C2DF91-3E6E-4567-ADB2-673B7A6CADAC}" dt="2025-07-22T23:05:41.099" v="1364" actId="1076"/>
-          <ac:picMkLst>
-            <pc:docMk/>
-            <pc:sldMk cId="2558128729" sldId="260"/>
-            <ac:picMk id="7" creationId="{E8BB148B-C00A-D412-C257-83EC74373CE2}"/>
-          </ac:picMkLst>
-        </pc:picChg>
-      </pc:sldChg>
-      <pc:sldChg chg="addSp delSp modSp new mod">
-        <pc:chgData name="淏铭 叶" userId="b3014e5ccf383018" providerId="LiveId" clId="{79C2DF91-3E6E-4567-ADB2-673B7A6CADAC}" dt="2025-07-24T03:44:55.768" v="1718" actId="1076"/>
-        <pc:sldMkLst>
-          <pc:docMk/>
-          <pc:sldMk cId="638090038" sldId="261"/>
-        </pc:sldMkLst>
-        <pc:spChg chg="mod">
-          <ac:chgData name="淏铭 叶" userId="b3014e5ccf383018" providerId="LiveId" clId="{79C2DF91-3E6E-4567-ADB2-673B7A6CADAC}" dt="2025-07-23T12:54:34.099" v="1490" actId="1076"/>
-          <ac:spMkLst>
-            <pc:docMk/>
-            <pc:sldMk cId="638090038" sldId="261"/>
-            <ac:spMk id="2" creationId="{2D056DC8-DCD3-4438-7F00-CCAEE68A0227}"/>
-          </ac:spMkLst>
-        </pc:spChg>
-        <pc:spChg chg="del mod">
-          <ac:chgData name="淏铭 叶" userId="b3014e5ccf383018" providerId="LiveId" clId="{79C2DF91-3E6E-4567-ADB2-673B7A6CADAC}" dt="2025-07-23T12:54:55.611" v="1494"/>
-          <ac:spMkLst>
-            <pc:docMk/>
-            <pc:sldMk cId="638090038" sldId="261"/>
-            <ac:spMk id="3" creationId="{9CA8FD50-5B91-B9BA-27BB-8B668439DD14}"/>
-          </ac:spMkLst>
-        </pc:spChg>
-        <pc:graphicFrameChg chg="add del mod modGraphic">
-          <ac:chgData name="淏铭 叶" userId="b3014e5ccf383018" providerId="LiveId" clId="{79C2DF91-3E6E-4567-ADB2-673B7A6CADAC}" dt="2025-07-23T22:40:28.674" v="1548" actId="478"/>
-          <ac:graphicFrameMkLst>
-            <pc:docMk/>
-            <pc:sldMk cId="638090038" sldId="261"/>
-            <ac:graphicFrameMk id="3" creationId="{BFDD6EEA-5771-063D-437A-38B4289A7AF4}"/>
-          </ac:graphicFrameMkLst>
-        </pc:graphicFrameChg>
-        <pc:graphicFrameChg chg="add mod modGraphic">
-          <ac:chgData name="淏铭 叶" userId="b3014e5ccf383018" providerId="LiveId" clId="{79C2DF91-3E6E-4567-ADB2-673B7A6CADAC}" dt="2025-07-24T03:44:55.768" v="1718" actId="1076"/>
-          <ac:graphicFrameMkLst>
-            <pc:docMk/>
-            <pc:sldMk cId="638090038" sldId="261"/>
-            <ac:graphicFrameMk id="4" creationId="{E0480313-E71E-5423-6CD9-ABBA06AA3378}"/>
-          </ac:graphicFrameMkLst>
-        </pc:graphicFrameChg>
-        <pc:picChg chg="add mod modCrop">
-          <ac:chgData name="淏铭 叶" userId="b3014e5ccf383018" providerId="LiveId" clId="{79C2DF91-3E6E-4567-ADB2-673B7A6CADAC}" dt="2025-07-24T03:44:51.291" v="1717" actId="1076"/>
-          <ac:picMkLst>
-            <pc:docMk/>
-            <pc:sldMk cId="638090038" sldId="261"/>
-            <ac:picMk id="5" creationId="{3F1E011D-9F20-E2DD-C77C-6836E2325E41}"/>
+            <ac:picMk id="8" creationId="{06B7B89A-0808-1784-51E4-E4AD0EF1361A}"/>
           </ac:picMkLst>
         </pc:picChg>
       </pc:sldChg>
@@ -522,7 +239,7 @@
           <a:p>
             <a:fld id="{0C0DDD9F-B8BF-4474-B76B-7807389E9F63}" type="datetimeFigureOut">
               <a:rPr lang="en-US" smtClean="0"/>
-              <a:t>7/23/2025</a:t>
+              <a:t>1/23/2026</a:t>
             </a:fld>
             <a:endParaRPr lang="en-US"/>
           </a:p>
@@ -1020,7 +737,7 @@
           <a:p>
             <a:fld id="{E8498674-B620-4502-8AF1-814666822285}" type="datetimeFigureOut">
               <a:rPr lang="en-US" smtClean="0"/>
-              <a:t>7/23/2025</a:t>
+              <a:t>1/23/2026</a:t>
             </a:fld>
             <a:endParaRPr lang="en-US"/>
           </a:p>
@@ -1218,7 +935,7 @@
           <a:p>
             <a:fld id="{E8498674-B620-4502-8AF1-814666822285}" type="datetimeFigureOut">
               <a:rPr lang="en-US" smtClean="0"/>
-              <a:t>7/23/2025</a:t>
+              <a:t>1/23/2026</a:t>
             </a:fld>
             <a:endParaRPr lang="en-US"/>
           </a:p>
@@ -1426,7 +1143,7 @@
           <a:p>
             <a:fld id="{E8498674-B620-4502-8AF1-814666822285}" type="datetimeFigureOut">
               <a:rPr lang="en-US" smtClean="0"/>
-              <a:t>7/23/2025</a:t>
+              <a:t>1/23/2026</a:t>
             </a:fld>
             <a:endParaRPr lang="en-US"/>
           </a:p>
@@ -1624,7 +1341,7 @@
           <a:p>
             <a:fld id="{E8498674-B620-4502-8AF1-814666822285}" type="datetimeFigureOut">
               <a:rPr lang="en-US" smtClean="0"/>
-              <a:t>7/23/2025</a:t>
+              <a:t>1/23/2026</a:t>
             </a:fld>
             <a:endParaRPr lang="en-US"/>
           </a:p>
@@ -1899,7 +1616,7 @@
           <a:p>
             <a:fld id="{E8498674-B620-4502-8AF1-814666822285}" type="datetimeFigureOut">
               <a:rPr lang="en-US" smtClean="0"/>
-              <a:t>7/23/2025</a:t>
+              <a:t>1/23/2026</a:t>
             </a:fld>
             <a:endParaRPr lang="en-US"/>
           </a:p>
@@ -2164,7 +1881,7 @@
           <a:p>
             <a:fld id="{E8498674-B620-4502-8AF1-814666822285}" type="datetimeFigureOut">
               <a:rPr lang="en-US" smtClean="0"/>
-              <a:t>7/23/2025</a:t>
+              <a:t>1/23/2026</a:t>
             </a:fld>
             <a:endParaRPr lang="en-US"/>
           </a:p>
@@ -2576,7 +2293,7 @@
           <a:p>
             <a:fld id="{E8498674-B620-4502-8AF1-814666822285}" type="datetimeFigureOut">
               <a:rPr lang="en-US" smtClean="0"/>
-              <a:t>7/23/2025</a:t>
+              <a:t>1/23/2026</a:t>
             </a:fld>
             <a:endParaRPr lang="en-US"/>
           </a:p>
@@ -2717,7 +2434,7 @@
           <a:p>
             <a:fld id="{E8498674-B620-4502-8AF1-814666822285}" type="datetimeFigureOut">
               <a:rPr lang="en-US" smtClean="0"/>
-              <a:t>7/23/2025</a:t>
+              <a:t>1/23/2026</a:t>
             </a:fld>
             <a:endParaRPr lang="en-US"/>
           </a:p>
@@ -2830,7 +2547,7 @@
           <a:p>
             <a:fld id="{E8498674-B620-4502-8AF1-814666822285}" type="datetimeFigureOut">
               <a:rPr lang="en-US" smtClean="0"/>
-              <a:t>7/23/2025</a:t>
+              <a:t>1/23/2026</a:t>
             </a:fld>
             <a:endParaRPr lang="en-US"/>
           </a:p>
@@ -3141,7 +2858,7 @@
           <a:p>
             <a:fld id="{E8498674-B620-4502-8AF1-814666822285}" type="datetimeFigureOut">
               <a:rPr lang="en-US" smtClean="0"/>
-              <a:t>7/23/2025</a:t>
+              <a:t>1/23/2026</a:t>
             </a:fld>
             <a:endParaRPr lang="en-US"/>
           </a:p>
@@ -3429,7 +3146,7 @@
           <a:p>
             <a:fld id="{E8498674-B620-4502-8AF1-814666822285}" type="datetimeFigureOut">
               <a:rPr lang="en-US" smtClean="0"/>
-              <a:t>7/23/2025</a:t>
+              <a:t>1/23/2026</a:t>
             </a:fld>
             <a:endParaRPr lang="en-US"/>
           </a:p>
@@ -3670,7 +3387,7 @@
           <a:p>
             <a:fld id="{E8498674-B620-4502-8AF1-814666822285}" type="datetimeFigureOut">
               <a:rPr lang="en-US" smtClean="0"/>
-              <a:t>7/23/2025</a:t>
+              <a:t>1/23/2026</a:t>
             </a:fld>
             <a:endParaRPr lang="en-US"/>
           </a:p>
